--- a/src/__tests__/fixtures/pptx/decorative-icon.pptx
+++ b/src/__tests__/fixtures/pptx/decorative-icon.pptx
@@ -366,7 +366,7 @@
         </p:blipFill>
         <p:spPr bwMode="auto">
           <a:xfrm flipH="1">
-            <a:off x="7366000" y="635000"/>
+            <a:off x="7366000" y="609600"/>
             <a:ext cx="508000" cy="508000"/>
           </a:xfrm>
           <a:prstGeom prst="rect">

--- a/src/__tests__/fixtures/pptx/decorative-icon.pptx
+++ b/src/__tests__/fixtures/pptx/decorative-icon.pptx
@@ -366,8 +366,8 @@
         </p:blipFill>
         <p:spPr bwMode="auto">
           <a:xfrm flipH="1">
-            <a:off x="7366000" y="609600"/>
-            <a:ext cx="508000" cy="508000"/>
+            <a:off x="7366000" y="698500"/>
+            <a:ext cx="254000" cy="254000"/>
           </a:xfrm>
           <a:prstGeom prst="rect">
             <a:avLst/>
